--- a/latex/pkuthss/tex/figs/New Microsoft PowerPoint Presentation.pptx
+++ b/latex/pkuthss/tex/figs/New Microsoft PowerPoint Presentation.pptx
@@ -6,6 +6,7 @@
   </p:sldMasterIdLst>
   <p:sldIdLst>
     <p:sldId id="256" r:id="rId2"/>
+    <p:sldId id="257" r:id="rId3"/>
   </p:sldIdLst>
   <p:sldSz cx="12192000" cy="6858000"/>
   <p:notesSz cx="6858000" cy="9144000"/>
@@ -104,6 +105,11 @@
       </a:defRPr>
     </a:lvl9pPr>
   </p:defaultTextStyle>
+  <p:extLst>
+    <p:ext uri="{EFAFB233-063F-42B5-8137-9DF3F51BA10A}">
+      <p15:sldGuideLst xmlns:p15="http://schemas.microsoft.com/office/powerpoint/2012/main"/>
+    </p:ext>
+  </p:extLst>
 </p:presentation>
 </file>
 
@@ -256,7 +262,7 @@
           <a:p>
             <a:fld id="{D215D993-DB08-42DA-BF67-240A53BFA871}" type="datetimeFigureOut">
               <a:rPr lang="zh-CN" altLang="en-US" smtClean="0"/>
-              <a:t>2026/9/20</a:t>
+              <a:t>2026/9/21</a:t>
             </a:fld>
             <a:endParaRPr lang="zh-CN" altLang="en-US"/>
           </a:p>
@@ -456,7 +462,7 @@
           <a:p>
             <a:fld id="{D215D993-DB08-42DA-BF67-240A53BFA871}" type="datetimeFigureOut">
               <a:rPr lang="zh-CN" altLang="en-US" smtClean="0"/>
-              <a:t>2026/9/20</a:t>
+              <a:t>2026/9/21</a:t>
             </a:fld>
             <a:endParaRPr lang="zh-CN" altLang="en-US"/>
           </a:p>
@@ -666,7 +672,7 @@
           <a:p>
             <a:fld id="{D215D993-DB08-42DA-BF67-240A53BFA871}" type="datetimeFigureOut">
               <a:rPr lang="zh-CN" altLang="en-US" smtClean="0"/>
-              <a:t>2026/9/20</a:t>
+              <a:t>2026/9/21</a:t>
             </a:fld>
             <a:endParaRPr lang="zh-CN" altLang="en-US"/>
           </a:p>
@@ -866,7 +872,7 @@
           <a:p>
             <a:fld id="{D215D993-DB08-42DA-BF67-240A53BFA871}" type="datetimeFigureOut">
               <a:rPr lang="zh-CN" altLang="en-US" smtClean="0"/>
-              <a:t>2026/9/20</a:t>
+              <a:t>2026/9/21</a:t>
             </a:fld>
             <a:endParaRPr lang="zh-CN" altLang="en-US"/>
           </a:p>
@@ -1142,7 +1148,7 @@
           <a:p>
             <a:fld id="{D215D993-DB08-42DA-BF67-240A53BFA871}" type="datetimeFigureOut">
               <a:rPr lang="zh-CN" altLang="en-US" smtClean="0"/>
-              <a:t>2026/9/20</a:t>
+              <a:t>2026/9/21</a:t>
             </a:fld>
             <a:endParaRPr lang="zh-CN" altLang="en-US"/>
           </a:p>
@@ -1410,7 +1416,7 @@
           <a:p>
             <a:fld id="{D215D993-DB08-42DA-BF67-240A53BFA871}" type="datetimeFigureOut">
               <a:rPr lang="zh-CN" altLang="en-US" smtClean="0"/>
-              <a:t>2026/9/20</a:t>
+              <a:t>2026/9/21</a:t>
             </a:fld>
             <a:endParaRPr lang="zh-CN" altLang="en-US"/>
           </a:p>
@@ -1825,7 +1831,7 @@
           <a:p>
             <a:fld id="{D215D993-DB08-42DA-BF67-240A53BFA871}" type="datetimeFigureOut">
               <a:rPr lang="zh-CN" altLang="en-US" smtClean="0"/>
-              <a:t>2026/9/20</a:t>
+              <a:t>2026/9/21</a:t>
             </a:fld>
             <a:endParaRPr lang="zh-CN" altLang="en-US"/>
           </a:p>
@@ -1967,7 +1973,7 @@
           <a:p>
             <a:fld id="{D215D993-DB08-42DA-BF67-240A53BFA871}" type="datetimeFigureOut">
               <a:rPr lang="zh-CN" altLang="en-US" smtClean="0"/>
-              <a:t>2026/9/20</a:t>
+              <a:t>2026/9/21</a:t>
             </a:fld>
             <a:endParaRPr lang="zh-CN" altLang="en-US"/>
           </a:p>
@@ -2080,7 +2086,7 @@
           <a:p>
             <a:fld id="{D215D993-DB08-42DA-BF67-240A53BFA871}" type="datetimeFigureOut">
               <a:rPr lang="zh-CN" altLang="en-US" smtClean="0"/>
-              <a:t>2026/9/20</a:t>
+              <a:t>2026/9/21</a:t>
             </a:fld>
             <a:endParaRPr lang="zh-CN" altLang="en-US"/>
           </a:p>
@@ -2393,7 +2399,7 @@
           <a:p>
             <a:fld id="{D215D993-DB08-42DA-BF67-240A53BFA871}" type="datetimeFigureOut">
               <a:rPr lang="zh-CN" altLang="en-US" smtClean="0"/>
-              <a:t>2026/9/20</a:t>
+              <a:t>2026/9/21</a:t>
             </a:fld>
             <a:endParaRPr lang="zh-CN" altLang="en-US"/>
           </a:p>
@@ -2682,7 +2688,7 @@
           <a:p>
             <a:fld id="{D215D993-DB08-42DA-BF67-240A53BFA871}" type="datetimeFigureOut">
               <a:rPr lang="zh-CN" altLang="en-US" smtClean="0"/>
-              <a:t>2026/9/20</a:t>
+              <a:t>2026/9/21</a:t>
             </a:fld>
             <a:endParaRPr lang="zh-CN" altLang="en-US"/>
           </a:p>
@@ -2925,7 +2931,7 @@
           <a:p>
             <a:fld id="{D215D993-DB08-42DA-BF67-240A53BFA871}" type="datetimeFigureOut">
               <a:rPr lang="zh-CN" altLang="en-US" smtClean="0"/>
-              <a:t>2026/9/20</a:t>
+              <a:t>2026/9/21</a:t>
             </a:fld>
             <a:endParaRPr lang="zh-CN" altLang="en-US"/>
           </a:p>
@@ -3643,6 +3649,97 @@
 </p:sld>
 </file>
 
+<file path=ppt/slides/slide2.xml><?xml version="1.0" encoding="utf-8"?>
+<p:sld xmlns:a="http://schemas.openxmlformats.org/drawingml/2006/main" xmlns:r="http://schemas.openxmlformats.org/officeDocument/2006/relationships" xmlns:p="http://schemas.openxmlformats.org/presentationml/2006/main">
+  <p:cSld>
+    <p:spTree>
+      <p:nvGrpSpPr>
+        <p:cNvPr id="1" name=""/>
+        <p:cNvGrpSpPr/>
+        <p:nvPr/>
+      </p:nvGrpSpPr>
+      <p:grpSpPr>
+        <a:xfrm>
+          <a:off x="0" y="0"/>
+          <a:ext cx="0" cy="0"/>
+          <a:chOff x="0" y="0"/>
+          <a:chExt cx="0" cy="0"/>
+        </a:xfrm>
+      </p:grpSpPr>
+      <p:pic>
+        <p:nvPicPr>
+          <p:cNvPr id="5" name="Picture 4">
+            <a:extLst>
+              <a:ext uri="{FF2B5EF4-FFF2-40B4-BE49-F238E27FC236}">
+                <a16:creationId xmlns:a16="http://schemas.microsoft.com/office/drawing/2014/main" id="{EEEA8465-3896-47F7-0BB3-98DFE1DF541B}"/>
+              </a:ext>
+            </a:extLst>
+          </p:cNvPr>
+          <p:cNvPicPr>
+            <a:picLocks noChangeAspect="1"/>
+          </p:cNvPicPr>
+          <p:nvPr/>
+        </p:nvPicPr>
+        <p:blipFill>
+          <a:blip r:embed="rId2"/>
+          <a:stretch>
+            <a:fillRect/>
+          </a:stretch>
+        </p:blipFill>
+        <p:spPr>
+          <a:xfrm>
+            <a:off x="6649978" y="526917"/>
+            <a:ext cx="4862808" cy="3647106"/>
+          </a:xfrm>
+          <a:prstGeom prst="rect">
+            <a:avLst/>
+          </a:prstGeom>
+        </p:spPr>
+      </p:pic>
+      <p:pic>
+        <p:nvPicPr>
+          <p:cNvPr id="7" name="Picture 6">
+            <a:extLst>
+              <a:ext uri="{FF2B5EF4-FFF2-40B4-BE49-F238E27FC236}">
+                <a16:creationId xmlns:a16="http://schemas.microsoft.com/office/drawing/2014/main" id="{BAF12C59-FE36-5B34-0792-D054D7E1C920}"/>
+              </a:ext>
+            </a:extLst>
+          </p:cNvPr>
+          <p:cNvPicPr>
+            <a:picLocks noChangeAspect="1"/>
+          </p:cNvPicPr>
+          <p:nvPr/>
+        </p:nvPicPr>
+        <p:blipFill>
+          <a:blip r:embed="rId3"/>
+          <a:srcRect l="10720" r="9726"/>
+          <a:stretch>
+            <a:fillRect/>
+          </a:stretch>
+        </p:blipFill>
+        <p:spPr>
+          <a:xfrm>
+            <a:off x="2169922" y="733881"/>
+            <a:ext cx="4804153" cy="3381400"/>
+          </a:xfrm>
+          <a:prstGeom prst="rect">
+            <a:avLst/>
+          </a:prstGeom>
+        </p:spPr>
+      </p:pic>
+    </p:spTree>
+    <p:extLst>
+      <p:ext uri="{BB962C8B-B14F-4D97-AF65-F5344CB8AC3E}">
+        <p14:creationId xmlns:p14="http://schemas.microsoft.com/office/powerpoint/2010/main" val="3441570308"/>
+      </p:ext>
+    </p:extLst>
+  </p:cSld>
+  <p:clrMapOvr>
+    <a:masterClrMapping/>
+  </p:clrMapOvr>
+</p:sld>
+</file>
+
 <file path=ppt/theme/theme1.xml><?xml version="1.0" encoding="utf-8"?>
 <a:theme xmlns:a="http://schemas.openxmlformats.org/drawingml/2006/main" name="Office Theme">
   <a:themeElements>

--- a/latex/pkuthss/tex/figs/New Microsoft PowerPoint Presentation.pptx
+++ b/latex/pkuthss/tex/figs/New Microsoft PowerPoint Presentation.pptx
@@ -7,6 +7,10 @@
   <p:sldIdLst>
     <p:sldId id="256" r:id="rId2"/>
     <p:sldId id="257" r:id="rId3"/>
+    <p:sldId id="258" r:id="rId4"/>
+    <p:sldId id="259" r:id="rId5"/>
+    <p:sldId id="260" r:id="rId6"/>
+    <p:sldId id="261" r:id="rId7"/>
   </p:sldIdLst>
   <p:sldSz cx="12192000" cy="6858000"/>
   <p:notesSz cx="6858000" cy="9144000"/>
@@ -262,7 +266,7 @@
           <a:p>
             <a:fld id="{D215D993-DB08-42DA-BF67-240A53BFA871}" type="datetimeFigureOut">
               <a:rPr lang="zh-CN" altLang="en-US" smtClean="0"/>
-              <a:t>2026/9/21</a:t>
+              <a:t>2026/9/28</a:t>
             </a:fld>
             <a:endParaRPr lang="zh-CN" altLang="en-US"/>
           </a:p>
@@ -462,7 +466,7 @@
           <a:p>
             <a:fld id="{D215D993-DB08-42DA-BF67-240A53BFA871}" type="datetimeFigureOut">
               <a:rPr lang="zh-CN" altLang="en-US" smtClean="0"/>
-              <a:t>2026/9/21</a:t>
+              <a:t>2026/9/28</a:t>
             </a:fld>
             <a:endParaRPr lang="zh-CN" altLang="en-US"/>
           </a:p>
@@ -672,7 +676,7 @@
           <a:p>
             <a:fld id="{D215D993-DB08-42DA-BF67-240A53BFA871}" type="datetimeFigureOut">
               <a:rPr lang="zh-CN" altLang="en-US" smtClean="0"/>
-              <a:t>2026/9/21</a:t>
+              <a:t>2026/9/28</a:t>
             </a:fld>
             <a:endParaRPr lang="zh-CN" altLang="en-US"/>
           </a:p>
@@ -872,7 +876,7 @@
           <a:p>
             <a:fld id="{D215D993-DB08-42DA-BF67-240A53BFA871}" type="datetimeFigureOut">
               <a:rPr lang="zh-CN" altLang="en-US" smtClean="0"/>
-              <a:t>2026/9/21</a:t>
+              <a:t>2026/9/28</a:t>
             </a:fld>
             <a:endParaRPr lang="zh-CN" altLang="en-US"/>
           </a:p>
@@ -1148,7 +1152,7 @@
           <a:p>
             <a:fld id="{D215D993-DB08-42DA-BF67-240A53BFA871}" type="datetimeFigureOut">
               <a:rPr lang="zh-CN" altLang="en-US" smtClean="0"/>
-              <a:t>2026/9/21</a:t>
+              <a:t>2026/9/28</a:t>
             </a:fld>
             <a:endParaRPr lang="zh-CN" altLang="en-US"/>
           </a:p>
@@ -1416,7 +1420,7 @@
           <a:p>
             <a:fld id="{D215D993-DB08-42DA-BF67-240A53BFA871}" type="datetimeFigureOut">
               <a:rPr lang="zh-CN" altLang="en-US" smtClean="0"/>
-              <a:t>2026/9/21</a:t>
+              <a:t>2026/9/28</a:t>
             </a:fld>
             <a:endParaRPr lang="zh-CN" altLang="en-US"/>
           </a:p>
@@ -1831,7 +1835,7 @@
           <a:p>
             <a:fld id="{D215D993-DB08-42DA-BF67-240A53BFA871}" type="datetimeFigureOut">
               <a:rPr lang="zh-CN" altLang="en-US" smtClean="0"/>
-              <a:t>2026/9/21</a:t>
+              <a:t>2026/9/28</a:t>
             </a:fld>
             <a:endParaRPr lang="zh-CN" altLang="en-US"/>
           </a:p>
@@ -1973,7 +1977,7 @@
           <a:p>
             <a:fld id="{D215D993-DB08-42DA-BF67-240A53BFA871}" type="datetimeFigureOut">
               <a:rPr lang="zh-CN" altLang="en-US" smtClean="0"/>
-              <a:t>2026/9/21</a:t>
+              <a:t>2026/9/28</a:t>
             </a:fld>
             <a:endParaRPr lang="zh-CN" altLang="en-US"/>
           </a:p>
@@ -2086,7 +2090,7 @@
           <a:p>
             <a:fld id="{D215D993-DB08-42DA-BF67-240A53BFA871}" type="datetimeFigureOut">
               <a:rPr lang="zh-CN" altLang="en-US" smtClean="0"/>
-              <a:t>2026/9/21</a:t>
+              <a:t>2026/9/28</a:t>
             </a:fld>
             <a:endParaRPr lang="zh-CN" altLang="en-US"/>
           </a:p>
@@ -2399,7 +2403,7 @@
           <a:p>
             <a:fld id="{D215D993-DB08-42DA-BF67-240A53BFA871}" type="datetimeFigureOut">
               <a:rPr lang="zh-CN" altLang="en-US" smtClean="0"/>
-              <a:t>2026/9/21</a:t>
+              <a:t>2026/9/28</a:t>
             </a:fld>
             <a:endParaRPr lang="zh-CN" altLang="en-US"/>
           </a:p>
@@ -2688,7 +2692,7 @@
           <a:p>
             <a:fld id="{D215D993-DB08-42DA-BF67-240A53BFA871}" type="datetimeFigureOut">
               <a:rPr lang="zh-CN" altLang="en-US" smtClean="0"/>
-              <a:t>2026/9/21</a:t>
+              <a:t>2026/9/28</a:t>
             </a:fld>
             <a:endParaRPr lang="zh-CN" altLang="en-US"/>
           </a:p>
@@ -2931,7 +2935,7 @@
           <a:p>
             <a:fld id="{D215D993-DB08-42DA-BF67-240A53BFA871}" type="datetimeFigureOut">
               <a:rPr lang="zh-CN" altLang="en-US" smtClean="0"/>
-              <a:t>2026/9/21</a:t>
+              <a:t>2026/9/28</a:t>
             </a:fld>
             <a:endParaRPr lang="zh-CN" altLang="en-US"/>
           </a:p>
@@ -3387,112 +3391,6 @@
       </p:pic>
       <p:pic>
         <p:nvPicPr>
-          <p:cNvPr id="7" name="Picture 6">
-            <a:extLst>
-              <a:ext uri="{FF2B5EF4-FFF2-40B4-BE49-F238E27FC236}">
-                <a16:creationId xmlns:a16="http://schemas.microsoft.com/office/drawing/2014/main" id="{548AF4B2-5991-9ED3-ACF2-F986C29169CA}"/>
-              </a:ext>
-            </a:extLst>
-          </p:cNvPr>
-          <p:cNvPicPr>
-            <a:picLocks noChangeAspect="1"/>
-          </p:cNvPicPr>
-          <p:nvPr/>
-        </p:nvPicPr>
-        <p:blipFill>
-          <a:blip r:embed="rId3">
-            <a:extLst>
-              <a:ext uri="{28A0092B-C50C-407E-A947-70E740481C1C}">
-                <a14:useLocalDpi xmlns:a14="http://schemas.microsoft.com/office/drawing/2010/main" val="0"/>
-              </a:ext>
-            </a:extLst>
-          </a:blip>
-          <a:stretch>
-            <a:fillRect/>
-          </a:stretch>
-        </p:blipFill>
-        <p:spPr>
-          <a:xfrm>
-            <a:off x="3153745" y="4440642"/>
-            <a:ext cx="6563834" cy="1050495"/>
-          </a:xfrm>
-          <a:prstGeom prst="rect">
-            <a:avLst/>
-          </a:prstGeom>
-        </p:spPr>
-      </p:pic>
-      <p:sp>
-        <p:nvSpPr>
-          <p:cNvPr id="8" name="TextBox 7">
-            <a:extLst>
-              <a:ext uri="{FF2B5EF4-FFF2-40B4-BE49-F238E27FC236}">
-                <a16:creationId xmlns:a16="http://schemas.microsoft.com/office/drawing/2014/main" id="{10408A43-BBA1-CB39-450D-AD67B726C61D}"/>
-              </a:ext>
-            </a:extLst>
-          </p:cNvPr>
-          <p:cNvSpPr txBox="1"/>
-          <p:nvPr/>
-        </p:nvSpPr>
-        <p:spPr>
-          <a:xfrm>
-            <a:off x="3866065" y="5538516"/>
-            <a:ext cx="877163" cy="369332"/>
-          </a:xfrm>
-          <a:prstGeom prst="rect">
-            <a:avLst/>
-          </a:prstGeom>
-          <a:noFill/>
-        </p:spPr>
-        <p:txBody>
-          <a:bodyPr wrap="none" rtlCol="0">
-            <a:spAutoFit/>
-          </a:bodyPr>
-          <a:lstStyle/>
-          <a:p>
-            <a:r>
-              <a:rPr lang="zh-CN" altLang="en-US" dirty="0"/>
-              <a:t>读取器</a:t>
-            </a:r>
-          </a:p>
-        </p:txBody>
-      </p:sp>
-      <p:sp>
-        <p:nvSpPr>
-          <p:cNvPr id="9" name="TextBox 8">
-            <a:extLst>
-              <a:ext uri="{FF2B5EF4-FFF2-40B4-BE49-F238E27FC236}">
-                <a16:creationId xmlns:a16="http://schemas.microsoft.com/office/drawing/2014/main" id="{C5B733B0-537B-F78A-0748-3E6CE5E95A07}"/>
-              </a:ext>
-            </a:extLst>
-          </p:cNvPr>
-          <p:cNvSpPr txBox="1"/>
-          <p:nvPr/>
-        </p:nvSpPr>
-        <p:spPr>
-          <a:xfrm>
-            <a:off x="8370516" y="5538516"/>
-            <a:ext cx="877163" cy="369332"/>
-          </a:xfrm>
-          <a:prstGeom prst="rect">
-            <a:avLst/>
-          </a:prstGeom>
-          <a:noFill/>
-        </p:spPr>
-        <p:txBody>
-          <a:bodyPr wrap="none" rtlCol="0">
-            <a:spAutoFit/>
-          </a:bodyPr>
-          <a:lstStyle/>
-          <a:p>
-            <a:r>
-              <a:rPr lang="zh-CN" altLang="en-US" dirty="0"/>
-              <a:t>光标签</a:t>
-            </a:r>
-          </a:p>
-        </p:txBody>
-      </p:sp>
-      <p:pic>
-        <p:nvPicPr>
           <p:cNvPr id="11" name="Picture 10">
             <a:extLst>
               <a:ext uri="{FF2B5EF4-FFF2-40B4-BE49-F238E27FC236}">
@@ -3636,6 +3534,50 @@
           </a:p>
         </p:txBody>
       </p:sp>
+      <p:pic>
+        <p:nvPicPr>
+          <p:cNvPr id="2" name="图片 6">
+            <a:extLst>
+              <a:ext uri="{FF2B5EF4-FFF2-40B4-BE49-F238E27FC236}">
+                <a16:creationId xmlns:a16="http://schemas.microsoft.com/office/drawing/2014/main" id="{72D147C7-9398-4BFD-6767-D2D4F037060F}"/>
+              </a:ext>
+            </a:extLst>
+          </p:cNvPr>
+          <p:cNvPicPr>
+            <a:picLocks noChangeAspect="1"/>
+          </p:cNvPicPr>
+          <p:nvPr/>
+        </p:nvPicPr>
+        <p:blipFill rotWithShape="1">
+          <a:blip r:embed="rId3" cstate="print">
+            <a:extLst>
+              <a:ext uri="{28A0092B-C50C-407E-A947-70E740481C1C}">
+                <a14:useLocalDpi xmlns:a14="http://schemas.microsoft.com/office/drawing/2010/main" val="0"/>
+              </a:ext>
+            </a:extLst>
+          </a:blip>
+          <a:srcRect r="23342"/>
+          <a:stretch/>
+        </p:blipFill>
+        <p:spPr bwMode="auto">
+          <a:xfrm>
+            <a:off x="3665857" y="4283956"/>
+            <a:ext cx="6534019" cy="1890297"/>
+          </a:xfrm>
+          <a:prstGeom prst="rect">
+            <a:avLst/>
+          </a:prstGeom>
+          <a:noFill/>
+          <a:ln>
+            <a:noFill/>
+          </a:ln>
+          <a:extLst>
+            <a:ext uri="{53640926-AAD7-44D8-BBD7-CCE9431645EC}">
+              <a14:shadowObscured xmlns:a14="http://schemas.microsoft.com/office/drawing/2010/main"/>
+            </a:ext>
+          </a:extLst>
+        </p:spPr>
+      </p:pic>
     </p:spTree>
     <p:extLst>
       <p:ext uri="{BB962C8B-B14F-4D97-AF65-F5344CB8AC3E}">
@@ -3731,6 +3673,1144 @@
     <p:extLst>
       <p:ext uri="{BB962C8B-B14F-4D97-AF65-F5344CB8AC3E}">
         <p14:creationId xmlns:p14="http://schemas.microsoft.com/office/powerpoint/2010/main" val="3441570308"/>
+      </p:ext>
+    </p:extLst>
+  </p:cSld>
+  <p:clrMapOvr>
+    <a:masterClrMapping/>
+  </p:clrMapOvr>
+</p:sld>
+</file>
+
+<file path=ppt/slides/slide3.xml><?xml version="1.0" encoding="utf-8"?>
+<p:sld xmlns:a="http://schemas.openxmlformats.org/drawingml/2006/main" xmlns:r="http://schemas.openxmlformats.org/officeDocument/2006/relationships" xmlns:p="http://schemas.openxmlformats.org/presentationml/2006/main">
+  <p:cSld>
+    <p:spTree>
+      <p:nvGrpSpPr>
+        <p:cNvPr id="1" name=""/>
+        <p:cNvGrpSpPr/>
+        <p:nvPr/>
+      </p:nvGrpSpPr>
+      <p:grpSpPr>
+        <a:xfrm>
+          <a:off x="0" y="0"/>
+          <a:ext cx="0" cy="0"/>
+          <a:chOff x="0" y="0"/>
+          <a:chExt cx="0" cy="0"/>
+        </a:xfrm>
+      </p:grpSpPr>
+      <p:pic>
+        <p:nvPicPr>
+          <p:cNvPr id="4" name="图片 7">
+            <a:extLst>
+              <a:ext uri="{FF2B5EF4-FFF2-40B4-BE49-F238E27FC236}">
+                <a16:creationId xmlns:a16="http://schemas.microsoft.com/office/drawing/2014/main" id="{5E0D5023-11FE-1ED4-88DD-1388A36D8063}"/>
+              </a:ext>
+            </a:extLst>
+          </p:cNvPr>
+          <p:cNvPicPr>
+            <a:picLocks noChangeAspect="1"/>
+          </p:cNvPicPr>
+          <p:nvPr/>
+        </p:nvPicPr>
+        <p:blipFill>
+          <a:blip r:embed="rId2" cstate="print">
+            <a:extLst>
+              <a:ext uri="{28A0092B-C50C-407E-A947-70E740481C1C}">
+                <a14:useLocalDpi xmlns:a14="http://schemas.microsoft.com/office/drawing/2010/main" val="0"/>
+              </a:ext>
+            </a:extLst>
+          </a:blip>
+          <a:srcRect/>
+          <a:stretch>
+            <a:fillRect/>
+          </a:stretch>
+        </p:blipFill>
+        <p:spPr bwMode="auto">
+          <a:xfrm>
+            <a:off x="1962490" y="2469561"/>
+            <a:ext cx="2646525" cy="526338"/>
+          </a:xfrm>
+          <a:prstGeom prst="rect">
+            <a:avLst/>
+          </a:prstGeom>
+          <a:noFill/>
+          <a:ln>
+            <a:noFill/>
+          </a:ln>
+        </p:spPr>
+      </p:pic>
+      <p:pic>
+        <p:nvPicPr>
+          <p:cNvPr id="5" name="图片 13">
+            <a:extLst>
+              <a:ext uri="{FF2B5EF4-FFF2-40B4-BE49-F238E27FC236}">
+                <a16:creationId xmlns:a16="http://schemas.microsoft.com/office/drawing/2014/main" id="{FFD95F3C-0E01-C2D9-4531-8751E16D32BE}"/>
+              </a:ext>
+            </a:extLst>
+          </p:cNvPr>
+          <p:cNvPicPr>
+            <a:picLocks noChangeAspect="1"/>
+          </p:cNvPicPr>
+          <p:nvPr/>
+        </p:nvPicPr>
+        <p:blipFill>
+          <a:blip r:embed="rId3" cstate="print">
+            <a:extLst>
+              <a:ext uri="{28A0092B-C50C-407E-A947-70E740481C1C}">
+                <a14:useLocalDpi xmlns:a14="http://schemas.microsoft.com/office/drawing/2010/main" val="0"/>
+              </a:ext>
+            </a:extLst>
+          </a:blip>
+          <a:srcRect/>
+          <a:stretch>
+            <a:fillRect/>
+          </a:stretch>
+        </p:blipFill>
+        <p:spPr bwMode="auto">
+          <a:xfrm>
+            <a:off x="1856685" y="4921105"/>
+            <a:ext cx="2858135" cy="936625"/>
+          </a:xfrm>
+          <a:prstGeom prst="rect">
+            <a:avLst/>
+          </a:prstGeom>
+          <a:noFill/>
+        </p:spPr>
+      </p:pic>
+      <p:pic>
+        <p:nvPicPr>
+          <p:cNvPr id="8" name="图片 9">
+            <a:extLst>
+              <a:ext uri="{FF2B5EF4-FFF2-40B4-BE49-F238E27FC236}">
+                <a16:creationId xmlns:a16="http://schemas.microsoft.com/office/drawing/2014/main" id="{6F2412B3-5976-961D-69D6-A4565F24578E}"/>
+              </a:ext>
+            </a:extLst>
+          </p:cNvPr>
+          <p:cNvPicPr>
+            <a:picLocks noChangeAspect="1"/>
+          </p:cNvPicPr>
+          <p:nvPr/>
+        </p:nvPicPr>
+        <p:blipFill>
+          <a:blip r:embed="rId4"/>
+          <a:stretch>
+            <a:fillRect/>
+          </a:stretch>
+        </p:blipFill>
+        <p:spPr>
+          <a:xfrm>
+            <a:off x="2214737" y="3278063"/>
+            <a:ext cx="2142031" cy="1574983"/>
+          </a:xfrm>
+          <a:prstGeom prst="rect">
+            <a:avLst/>
+          </a:prstGeom>
+        </p:spPr>
+      </p:pic>
+      <p:pic>
+        <p:nvPicPr>
+          <p:cNvPr id="9" name="图片 10">
+            <a:extLst>
+              <a:ext uri="{FF2B5EF4-FFF2-40B4-BE49-F238E27FC236}">
+                <a16:creationId xmlns:a16="http://schemas.microsoft.com/office/drawing/2014/main" id="{F12F4DCD-F955-13AF-D4D1-36E37C9C17D1}"/>
+              </a:ext>
+            </a:extLst>
+          </p:cNvPr>
+          <p:cNvPicPr>
+            <a:picLocks noChangeAspect="1"/>
+          </p:cNvPicPr>
+          <p:nvPr/>
+        </p:nvPicPr>
+        <p:blipFill>
+          <a:blip r:embed="rId5" cstate="print">
+            <a:extLst>
+              <a:ext uri="{28A0092B-C50C-407E-A947-70E740481C1C}">
+                <a14:useLocalDpi xmlns:a14="http://schemas.microsoft.com/office/drawing/2010/main" val="0"/>
+              </a:ext>
+            </a:extLst>
+          </a:blip>
+          <a:srcRect t="16934" b="21239"/>
+          <a:stretch>
+            <a:fillRect/>
+          </a:stretch>
+        </p:blipFill>
+        <p:spPr bwMode="auto">
+          <a:xfrm>
+            <a:off x="6910656" y="1380596"/>
+            <a:ext cx="2900045" cy="1007745"/>
+          </a:xfrm>
+          <a:prstGeom prst="rect">
+            <a:avLst/>
+          </a:prstGeom>
+          <a:noFill/>
+          <a:ln>
+            <a:noFill/>
+          </a:ln>
+        </p:spPr>
+      </p:pic>
+      <p:pic>
+        <p:nvPicPr>
+          <p:cNvPr id="10" name="图片 12">
+            <a:extLst>
+              <a:ext uri="{FF2B5EF4-FFF2-40B4-BE49-F238E27FC236}">
+                <a16:creationId xmlns:a16="http://schemas.microsoft.com/office/drawing/2014/main" id="{8D453608-165E-68F4-C9E3-A73B85201B80}"/>
+              </a:ext>
+            </a:extLst>
+          </p:cNvPr>
+          <p:cNvPicPr>
+            <a:picLocks noChangeAspect="1"/>
+          </p:cNvPicPr>
+          <p:nvPr/>
+        </p:nvPicPr>
+        <p:blipFill>
+          <a:blip r:embed="rId6">
+            <a:extLst>
+              <a:ext uri="{28A0092B-C50C-407E-A947-70E740481C1C}">
+                <a14:useLocalDpi xmlns:a14="http://schemas.microsoft.com/office/drawing/2010/main" val="0"/>
+              </a:ext>
+            </a:extLst>
+          </a:blip>
+          <a:srcRect/>
+          <a:stretch>
+            <a:fillRect/>
+          </a:stretch>
+        </p:blipFill>
+        <p:spPr bwMode="auto">
+          <a:xfrm>
+            <a:off x="6873289" y="2533786"/>
+            <a:ext cx="2974779" cy="3397553"/>
+          </a:xfrm>
+          <a:prstGeom prst="rect">
+            <a:avLst/>
+          </a:prstGeom>
+          <a:noFill/>
+        </p:spPr>
+      </p:pic>
+    </p:spTree>
+    <p:extLst>
+      <p:ext uri="{BB962C8B-B14F-4D97-AF65-F5344CB8AC3E}">
+        <p14:creationId xmlns:p14="http://schemas.microsoft.com/office/powerpoint/2010/main" val="2437456826"/>
+      </p:ext>
+    </p:extLst>
+  </p:cSld>
+  <p:clrMapOvr>
+    <a:masterClrMapping/>
+  </p:clrMapOvr>
+</p:sld>
+</file>
+
+<file path=ppt/slides/slide4.xml><?xml version="1.0" encoding="utf-8"?>
+<p:sld xmlns:a="http://schemas.openxmlformats.org/drawingml/2006/main" xmlns:r="http://schemas.openxmlformats.org/officeDocument/2006/relationships" xmlns:p="http://schemas.openxmlformats.org/presentationml/2006/main">
+  <p:cSld>
+    <p:spTree>
+      <p:nvGrpSpPr>
+        <p:cNvPr id="1" name=""/>
+        <p:cNvGrpSpPr/>
+        <p:nvPr/>
+      </p:nvGrpSpPr>
+      <p:grpSpPr>
+        <a:xfrm>
+          <a:off x="0" y="0"/>
+          <a:ext cx="0" cy="0"/>
+          <a:chOff x="0" y="0"/>
+          <a:chExt cx="0" cy="0"/>
+        </a:xfrm>
+      </p:grpSpPr>
+      <p:pic>
+        <p:nvPicPr>
+          <p:cNvPr id="6" name="图片 55">
+            <a:extLst>
+              <a:ext uri="{FF2B5EF4-FFF2-40B4-BE49-F238E27FC236}">
+                <a16:creationId xmlns:a16="http://schemas.microsoft.com/office/drawing/2014/main" id="{518EBAEB-A5B2-C349-3559-9163035C3CDB}"/>
+              </a:ext>
+            </a:extLst>
+          </p:cNvPr>
+          <p:cNvPicPr>
+            <a:picLocks noChangeAspect="1"/>
+          </p:cNvPicPr>
+          <p:nvPr/>
+        </p:nvPicPr>
+        <p:blipFill>
+          <a:blip r:embed="rId2"/>
+          <a:stretch>
+            <a:fillRect/>
+          </a:stretch>
+        </p:blipFill>
+        <p:spPr>
+          <a:xfrm>
+            <a:off x="398521" y="465471"/>
+            <a:ext cx="1799590" cy="1079500"/>
+          </a:xfrm>
+          <a:prstGeom prst="rect">
+            <a:avLst/>
+          </a:prstGeom>
+        </p:spPr>
+      </p:pic>
+      <p:pic>
+        <p:nvPicPr>
+          <p:cNvPr id="7" name="图片 16">
+            <a:extLst>
+              <a:ext uri="{FF2B5EF4-FFF2-40B4-BE49-F238E27FC236}">
+                <a16:creationId xmlns:a16="http://schemas.microsoft.com/office/drawing/2014/main" id="{37CFBF37-ABD9-EB09-50B0-99FB74A2BAB9}"/>
+              </a:ext>
+            </a:extLst>
+          </p:cNvPr>
+          <p:cNvPicPr>
+            <a:picLocks noChangeAspect="1"/>
+          </p:cNvPicPr>
+          <p:nvPr/>
+        </p:nvPicPr>
+        <p:blipFill>
+          <a:blip r:embed="rId3"/>
+          <a:stretch>
+            <a:fillRect/>
+          </a:stretch>
+        </p:blipFill>
+        <p:spPr>
+          <a:xfrm>
+            <a:off x="4470186" y="465471"/>
+            <a:ext cx="1799590" cy="1079500"/>
+          </a:xfrm>
+          <a:prstGeom prst="rect">
+            <a:avLst/>
+          </a:prstGeom>
+        </p:spPr>
+      </p:pic>
+      <p:pic>
+        <p:nvPicPr>
+          <p:cNvPr id="8" name="图片 17">
+            <a:extLst>
+              <a:ext uri="{FF2B5EF4-FFF2-40B4-BE49-F238E27FC236}">
+                <a16:creationId xmlns:a16="http://schemas.microsoft.com/office/drawing/2014/main" id="{FF44DF3B-9D29-C708-7685-D27D5E831885}"/>
+              </a:ext>
+            </a:extLst>
+          </p:cNvPr>
+          <p:cNvPicPr>
+            <a:picLocks noChangeAspect="1"/>
+          </p:cNvPicPr>
+          <p:nvPr/>
+        </p:nvPicPr>
+        <p:blipFill>
+          <a:blip r:embed="rId4"/>
+          <a:stretch>
+            <a:fillRect/>
+          </a:stretch>
+        </p:blipFill>
+        <p:spPr>
+          <a:xfrm>
+            <a:off x="2434353" y="465471"/>
+            <a:ext cx="1799590" cy="1079500"/>
+          </a:xfrm>
+          <a:prstGeom prst="rect">
+            <a:avLst/>
+          </a:prstGeom>
+        </p:spPr>
+      </p:pic>
+      <p:graphicFrame>
+        <p:nvGraphicFramePr>
+          <p:cNvPr id="9" name="Table 8">
+            <a:extLst>
+              <a:ext uri="{FF2B5EF4-FFF2-40B4-BE49-F238E27FC236}">
+                <a16:creationId xmlns:a16="http://schemas.microsoft.com/office/drawing/2014/main" id="{FD7B02C8-CB09-D1D5-B7F5-EBCA4A727E17}"/>
+              </a:ext>
+            </a:extLst>
+          </p:cNvPr>
+          <p:cNvGraphicFramePr>
+            <a:graphicFrameLocks noGrp="1"/>
+          </p:cNvGraphicFramePr>
+          <p:nvPr>
+            <p:extLst>
+              <p:ext uri="{D42A27DB-BD31-4B8C-83A1-F6EECF244321}">
+                <p14:modId xmlns:p14="http://schemas.microsoft.com/office/powerpoint/2010/main" val="2028035466"/>
+              </p:ext>
+            </p:extLst>
+          </p:nvPr>
+        </p:nvGraphicFramePr>
+        <p:xfrm>
+          <a:off x="521877" y="1617163"/>
+          <a:ext cx="5638058" cy="428625"/>
+        </p:xfrm>
+        <a:graphic>
+          <a:graphicData uri="http://schemas.openxmlformats.org/drawingml/2006/table">
+            <a:tbl>
+              <a:tblPr firstRow="1" firstCol="1" bandRow="1">
+                <a:tableStyleId>{9D7B26C5-4107-4FEC-AEDC-1716B250A1EF}</a:tableStyleId>
+              </a:tblPr>
+              <a:tblGrid>
+                <a:gridCol w="1333330">
+                  <a:extLst>
+                    <a:ext uri="{9D8B030D-6E8A-4147-A177-3AD203B41FA5}">
+                      <a16:colId xmlns:a16="http://schemas.microsoft.com/office/drawing/2014/main" val="2058184508"/>
+                    </a:ext>
+                  </a:extLst>
+                </a:gridCol>
+                <a:gridCol w="1332394">
+                  <a:extLst>
+                    <a:ext uri="{9D8B030D-6E8A-4147-A177-3AD203B41FA5}">
+                      <a16:colId xmlns:a16="http://schemas.microsoft.com/office/drawing/2014/main" val="611092813"/>
+                    </a:ext>
+                  </a:extLst>
+                </a:gridCol>
+                <a:gridCol w="1199249">
+                  <a:extLst>
+                    <a:ext uri="{9D8B030D-6E8A-4147-A177-3AD203B41FA5}">
+                      <a16:colId xmlns:a16="http://schemas.microsoft.com/office/drawing/2014/main" val="1163310106"/>
+                    </a:ext>
+                  </a:extLst>
+                </a:gridCol>
+                <a:gridCol w="1773085">
+                  <a:extLst>
+                    <a:ext uri="{9D8B030D-6E8A-4147-A177-3AD203B41FA5}">
+                      <a16:colId xmlns:a16="http://schemas.microsoft.com/office/drawing/2014/main" val="65690608"/>
+                    </a:ext>
+                  </a:extLst>
+                </a:gridCol>
+              </a:tblGrid>
+              <a:tr h="142875">
+                <a:tc>
+                  <a:txBody>
+                    <a:bodyPr/>
+                    <a:lstStyle/>
+                    <a:p>
+                      <a:pPr indent="191135" algn="ctr" hangingPunct="0">
+                        <a:spcBef>
+                          <a:spcPts val="1200"/>
+                        </a:spcBef>
+                        <a:spcAft>
+                          <a:spcPts val="600"/>
+                        </a:spcAft>
+                        <a:buNone/>
+                      </a:pPr>
+                      <a:r>
+                        <a:rPr lang="zh-CN" sz="750" kern="100">
+                          <a:effectLst/>
+                        </a:rPr>
+                        <a:t>种类</a:t>
+                      </a:r>
+                      <a:endParaRPr lang="zh-CN" sz="1400" kern="100">
+                        <a:effectLst/>
+                        <a:latin typeface="DejaVu Sans"/>
+                        <a:ea typeface="DejaVu Sans"/>
+                      </a:endParaRPr>
+                    </a:p>
+                  </a:txBody>
+                  <a:tcPr marL="68580" marR="68580" marT="0" marB="0" anchor="ctr"/>
+                </a:tc>
+                <a:tc>
+                  <a:txBody>
+                    <a:bodyPr/>
+                    <a:lstStyle/>
+                    <a:p>
+                      <a:pPr indent="191135" algn="ctr" hangingPunct="0">
+                        <a:spcBef>
+                          <a:spcPts val="1200"/>
+                        </a:spcBef>
+                        <a:spcAft>
+                          <a:spcPts val="600"/>
+                        </a:spcAft>
+                        <a:buNone/>
+                      </a:pPr>
+                      <a:r>
+                        <a:rPr lang="zh-CN" sz="750" kern="100">
+                          <a:effectLst/>
+                        </a:rPr>
+                        <a:t>面积</a:t>
+                      </a:r>
+                      <a:endParaRPr lang="zh-CN" sz="1400" kern="100">
+                        <a:effectLst/>
+                        <a:latin typeface="DejaVu Sans"/>
+                        <a:ea typeface="DejaVu Sans"/>
+                      </a:endParaRPr>
+                    </a:p>
+                  </a:txBody>
+                  <a:tcPr marL="68580" marR="68580" marT="0" marB="0" anchor="ctr"/>
+                </a:tc>
+                <a:tc>
+                  <a:txBody>
+                    <a:bodyPr/>
+                    <a:lstStyle/>
+                    <a:p>
+                      <a:pPr indent="191135" algn="ctr" hangingPunct="0">
+                        <a:spcBef>
+                          <a:spcPts val="1200"/>
+                        </a:spcBef>
+                        <a:spcAft>
+                          <a:spcPts val="600"/>
+                        </a:spcAft>
+                        <a:buNone/>
+                      </a:pPr>
+                      <a:r>
+                        <a:rPr lang="zh-CN" sz="750" kern="100">
+                          <a:effectLst/>
+                        </a:rPr>
+                        <a:t>能耗</a:t>
+                      </a:r>
+                      <a:endParaRPr lang="zh-CN" sz="1400" kern="100">
+                        <a:effectLst/>
+                        <a:latin typeface="DejaVu Sans"/>
+                        <a:ea typeface="DejaVu Sans"/>
+                      </a:endParaRPr>
+                    </a:p>
+                  </a:txBody>
+                  <a:tcPr marL="68580" marR="68580" marT="0" marB="0" anchor="ctr"/>
+                </a:tc>
+                <a:tc>
+                  <a:txBody>
+                    <a:bodyPr/>
+                    <a:lstStyle/>
+                    <a:p>
+                      <a:pPr indent="191135" algn="ctr" hangingPunct="0">
+                        <a:spcBef>
+                          <a:spcPts val="1200"/>
+                        </a:spcBef>
+                        <a:spcAft>
+                          <a:spcPts val="600"/>
+                        </a:spcAft>
+                        <a:buNone/>
+                      </a:pPr>
+                      <a:r>
+                        <a:rPr lang="zh-CN" sz="750" kern="100">
+                          <a:effectLst/>
+                        </a:rPr>
+                        <a:t>最大上行距离</a:t>
+                      </a:r>
+                      <a:endParaRPr lang="zh-CN" sz="1400" kern="100">
+                        <a:effectLst/>
+                        <a:latin typeface="DejaVu Sans"/>
+                        <a:ea typeface="DejaVu Sans"/>
+                      </a:endParaRPr>
+                    </a:p>
+                  </a:txBody>
+                  <a:tcPr marL="68580" marR="68580" marT="0" marB="0" anchor="ctr"/>
+                </a:tc>
+                <a:extLst>
+                  <a:ext uri="{0D108BD9-81ED-4DB2-BD59-A6C34878D82A}">
+                    <a16:rowId xmlns:a16="http://schemas.microsoft.com/office/drawing/2014/main" val="3559598945"/>
+                  </a:ext>
+                </a:extLst>
+              </a:tr>
+              <a:tr h="142875">
+                <a:tc>
+                  <a:txBody>
+                    <a:bodyPr/>
+                    <a:lstStyle/>
+                    <a:p>
+                      <a:pPr indent="190500" algn="ctr" hangingPunct="0">
+                        <a:spcBef>
+                          <a:spcPts val="1200"/>
+                        </a:spcBef>
+                        <a:spcAft>
+                          <a:spcPts val="600"/>
+                        </a:spcAft>
+                        <a:buNone/>
+                      </a:pPr>
+                      <a:r>
+                        <a:rPr lang="zh-CN" sz="750" kern="100">
+                          <a:effectLst/>
+                        </a:rPr>
+                        <a:t>小刚性光标签</a:t>
+                      </a:r>
+                      <a:endParaRPr lang="zh-CN" sz="1400" kern="100">
+                        <a:effectLst/>
+                        <a:latin typeface="DejaVu Sans"/>
+                        <a:ea typeface="DejaVu Sans"/>
+                      </a:endParaRPr>
+                    </a:p>
+                  </a:txBody>
+                  <a:tcPr marL="68580" marR="68580" marT="0" marB="0" anchor="ctr"/>
+                </a:tc>
+                <a:tc>
+                  <a:txBody>
+                    <a:bodyPr/>
+                    <a:lstStyle/>
+                    <a:p>
+                      <a:pPr indent="190500" algn="ctr" hangingPunct="0">
+                        <a:spcBef>
+                          <a:spcPts val="1200"/>
+                        </a:spcBef>
+                        <a:spcAft>
+                          <a:spcPts val="600"/>
+                        </a:spcAft>
+                        <a:buNone/>
+                      </a:pPr>
+                      <a:r>
+                        <a:rPr lang="en-US" sz="750" kern="100">
+                          <a:effectLst/>
+                        </a:rPr>
+                        <a:t>38.00 cm</a:t>
+                      </a:r>
+                      <a:r>
+                        <a:rPr lang="en-US" sz="750" kern="100" baseline="30000">
+                          <a:effectLst/>
+                        </a:rPr>
+                        <a:t>2</a:t>
+                      </a:r>
+                      <a:endParaRPr lang="zh-CN" sz="1400" kern="100">
+                        <a:effectLst/>
+                        <a:latin typeface="DejaVu Sans"/>
+                        <a:ea typeface="DejaVu Sans"/>
+                      </a:endParaRPr>
+                    </a:p>
+                  </a:txBody>
+                  <a:tcPr marL="68580" marR="68580" marT="0" marB="0" anchor="ctr"/>
+                </a:tc>
+                <a:tc>
+                  <a:txBody>
+                    <a:bodyPr/>
+                    <a:lstStyle/>
+                    <a:p>
+                      <a:pPr indent="190500" algn="ctr" hangingPunct="0">
+                        <a:spcBef>
+                          <a:spcPts val="1200"/>
+                        </a:spcBef>
+                        <a:spcAft>
+                          <a:spcPts val="600"/>
+                        </a:spcAft>
+                        <a:buNone/>
+                      </a:pPr>
+                      <a:r>
+                        <a:rPr lang="en-US" sz="750" kern="100">
+                          <a:effectLst/>
+                        </a:rPr>
+                        <a:t>2.82 mW</a:t>
+                      </a:r>
+                      <a:endParaRPr lang="zh-CN" sz="1400" kern="100">
+                        <a:effectLst/>
+                        <a:latin typeface="DejaVu Sans"/>
+                        <a:ea typeface="DejaVu Sans"/>
+                      </a:endParaRPr>
+                    </a:p>
+                  </a:txBody>
+                  <a:tcPr marL="68580" marR="68580" marT="0" marB="0" anchor="ctr"/>
+                </a:tc>
+                <a:tc>
+                  <a:txBody>
+                    <a:bodyPr/>
+                    <a:lstStyle/>
+                    <a:p>
+                      <a:pPr indent="190500" algn="ctr" hangingPunct="0">
+                        <a:spcBef>
+                          <a:spcPts val="1200"/>
+                        </a:spcBef>
+                        <a:spcAft>
+                          <a:spcPts val="600"/>
+                        </a:spcAft>
+                        <a:buNone/>
+                      </a:pPr>
+                      <a:r>
+                        <a:rPr lang="en-US" sz="750" kern="100" dirty="0">
+                          <a:effectLst/>
+                        </a:rPr>
+                        <a:t>140.00 cm</a:t>
+                      </a:r>
+                      <a:endParaRPr lang="zh-CN" sz="1400" kern="100" dirty="0">
+                        <a:effectLst/>
+                        <a:latin typeface="DejaVu Sans"/>
+                        <a:ea typeface="DejaVu Sans"/>
+                      </a:endParaRPr>
+                    </a:p>
+                  </a:txBody>
+                  <a:tcPr marL="68580" marR="68580" marT="0" marB="0" anchor="ctr"/>
+                </a:tc>
+                <a:extLst>
+                  <a:ext uri="{0D108BD9-81ED-4DB2-BD59-A6C34878D82A}">
+                    <a16:rowId xmlns:a16="http://schemas.microsoft.com/office/drawing/2014/main" val="1410154211"/>
+                  </a:ext>
+                </a:extLst>
+              </a:tr>
+              <a:tr h="142875">
+                <a:tc>
+                  <a:txBody>
+                    <a:bodyPr/>
+                    <a:lstStyle/>
+                    <a:p>
+                      <a:pPr indent="190500" algn="ctr" hangingPunct="0">
+                        <a:spcBef>
+                          <a:spcPts val="1200"/>
+                        </a:spcBef>
+                        <a:spcAft>
+                          <a:spcPts val="600"/>
+                        </a:spcAft>
+                        <a:buNone/>
+                      </a:pPr>
+                      <a:r>
+                        <a:rPr lang="zh-CN" sz="750" kern="100">
+                          <a:effectLst/>
+                        </a:rPr>
+                        <a:t>大刚性光标签</a:t>
+                      </a:r>
+                      <a:endParaRPr lang="zh-CN" sz="1400" kern="100">
+                        <a:effectLst/>
+                        <a:latin typeface="DejaVu Sans"/>
+                        <a:ea typeface="DejaVu Sans"/>
+                      </a:endParaRPr>
+                    </a:p>
+                  </a:txBody>
+                  <a:tcPr marL="68580" marR="68580" marT="0" marB="0" anchor="ctr"/>
+                </a:tc>
+                <a:tc>
+                  <a:txBody>
+                    <a:bodyPr/>
+                    <a:lstStyle/>
+                    <a:p>
+                      <a:pPr indent="190500" algn="ctr" hangingPunct="0">
+                        <a:spcBef>
+                          <a:spcPts val="1200"/>
+                        </a:spcBef>
+                        <a:spcAft>
+                          <a:spcPts val="600"/>
+                        </a:spcAft>
+                        <a:buNone/>
+                      </a:pPr>
+                      <a:r>
+                        <a:rPr lang="en-US" sz="750" kern="100">
+                          <a:effectLst/>
+                        </a:rPr>
+                        <a:t>163.84 cm</a:t>
+                      </a:r>
+                      <a:r>
+                        <a:rPr lang="en-US" sz="750" kern="100" baseline="30000">
+                          <a:effectLst/>
+                        </a:rPr>
+                        <a:t>2</a:t>
+                      </a:r>
+                      <a:endParaRPr lang="zh-CN" sz="1400" kern="100">
+                        <a:effectLst/>
+                        <a:latin typeface="DejaVu Sans"/>
+                        <a:ea typeface="DejaVu Sans"/>
+                      </a:endParaRPr>
+                    </a:p>
+                  </a:txBody>
+                  <a:tcPr marL="68580" marR="68580" marT="0" marB="0" anchor="ctr"/>
+                </a:tc>
+                <a:tc>
+                  <a:txBody>
+                    <a:bodyPr/>
+                    <a:lstStyle/>
+                    <a:p>
+                      <a:pPr indent="190500" algn="ctr" hangingPunct="0">
+                        <a:spcBef>
+                          <a:spcPts val="1200"/>
+                        </a:spcBef>
+                        <a:spcAft>
+                          <a:spcPts val="600"/>
+                        </a:spcAft>
+                        <a:buNone/>
+                      </a:pPr>
+                      <a:r>
+                        <a:rPr lang="en-US" sz="750" kern="100">
+                          <a:effectLst/>
+                        </a:rPr>
+                        <a:t>12.17 mW</a:t>
+                      </a:r>
+                      <a:endParaRPr lang="zh-CN" sz="1400" kern="100">
+                        <a:effectLst/>
+                        <a:latin typeface="DejaVu Sans"/>
+                        <a:ea typeface="DejaVu Sans"/>
+                      </a:endParaRPr>
+                    </a:p>
+                  </a:txBody>
+                  <a:tcPr marL="68580" marR="68580" marT="0" marB="0" anchor="ctr"/>
+                </a:tc>
+                <a:tc>
+                  <a:txBody>
+                    <a:bodyPr/>
+                    <a:lstStyle/>
+                    <a:p>
+                      <a:pPr indent="190500" algn="ctr" hangingPunct="0">
+                        <a:spcBef>
+                          <a:spcPts val="1200"/>
+                        </a:spcBef>
+                        <a:spcAft>
+                          <a:spcPts val="600"/>
+                        </a:spcAft>
+                        <a:buNone/>
+                      </a:pPr>
+                      <a:r>
+                        <a:rPr lang="en-US" sz="750" kern="100" dirty="0">
+                          <a:effectLst/>
+                        </a:rPr>
+                        <a:t>275.00 cm</a:t>
+                      </a:r>
+                      <a:endParaRPr lang="zh-CN" sz="1400" kern="100" dirty="0">
+                        <a:effectLst/>
+                        <a:latin typeface="DejaVu Sans"/>
+                        <a:ea typeface="DejaVu Sans"/>
+                      </a:endParaRPr>
+                    </a:p>
+                  </a:txBody>
+                  <a:tcPr marL="68580" marR="68580" marT="0" marB="0" anchor="ctr"/>
+                </a:tc>
+                <a:extLst>
+                  <a:ext uri="{0D108BD9-81ED-4DB2-BD59-A6C34878D82A}">
+                    <a16:rowId xmlns:a16="http://schemas.microsoft.com/office/drawing/2014/main" val="1320625994"/>
+                  </a:ext>
+                </a:extLst>
+              </a:tr>
+            </a:tbl>
+          </a:graphicData>
+        </a:graphic>
+      </p:graphicFrame>
+      <p:pic>
+        <p:nvPicPr>
+          <p:cNvPr id="4" name="图片 51">
+            <a:extLst>
+              <a:ext uri="{FF2B5EF4-FFF2-40B4-BE49-F238E27FC236}">
+                <a16:creationId xmlns:a16="http://schemas.microsoft.com/office/drawing/2014/main" id="{84958ED2-7083-07F6-FA92-B1A0AB7A76E9}"/>
+              </a:ext>
+            </a:extLst>
+          </p:cNvPr>
+          <p:cNvPicPr>
+            <a:picLocks noChangeAspect="1"/>
+          </p:cNvPicPr>
+          <p:nvPr/>
+        </p:nvPicPr>
+        <p:blipFill>
+          <a:blip r:embed="rId5"/>
+          <a:stretch>
+            <a:fillRect/>
+          </a:stretch>
+        </p:blipFill>
+        <p:spPr>
+          <a:xfrm>
+            <a:off x="5447016" y="2460146"/>
+            <a:ext cx="2159635" cy="1295400"/>
+          </a:xfrm>
+          <a:prstGeom prst="rect">
+            <a:avLst/>
+          </a:prstGeom>
+        </p:spPr>
+      </p:pic>
+      <p:pic>
+        <p:nvPicPr>
+          <p:cNvPr id="5" name="图片 53">
+            <a:extLst>
+              <a:ext uri="{FF2B5EF4-FFF2-40B4-BE49-F238E27FC236}">
+                <a16:creationId xmlns:a16="http://schemas.microsoft.com/office/drawing/2014/main" id="{89050E0F-8F32-2EE8-7C20-1A327C209B16}"/>
+              </a:ext>
+            </a:extLst>
+          </p:cNvPr>
+          <p:cNvPicPr>
+            <a:picLocks noChangeAspect="1"/>
+          </p:cNvPicPr>
+          <p:nvPr/>
+        </p:nvPicPr>
+        <p:blipFill>
+          <a:blip r:embed="rId6"/>
+          <a:srcRect l="4438"/>
+          <a:stretch>
+            <a:fillRect/>
+          </a:stretch>
+        </p:blipFill>
+        <p:spPr>
+          <a:xfrm>
+            <a:off x="3394430" y="3691431"/>
+            <a:ext cx="4076887" cy="2533150"/>
+          </a:xfrm>
+          <a:prstGeom prst="rect">
+            <a:avLst/>
+          </a:prstGeom>
+        </p:spPr>
+      </p:pic>
+      <p:pic>
+        <p:nvPicPr>
+          <p:cNvPr id="3" name="图片 52">
+            <a:extLst>
+              <a:ext uri="{FF2B5EF4-FFF2-40B4-BE49-F238E27FC236}">
+                <a16:creationId xmlns:a16="http://schemas.microsoft.com/office/drawing/2014/main" id="{E7DCF0A4-6930-717D-647D-205700BB4033}"/>
+              </a:ext>
+            </a:extLst>
+          </p:cNvPr>
+          <p:cNvPicPr>
+            <a:picLocks noChangeAspect="1"/>
+          </p:cNvPicPr>
+          <p:nvPr/>
+        </p:nvPicPr>
+        <p:blipFill>
+          <a:blip r:embed="rId7"/>
+          <a:stretch>
+            <a:fillRect/>
+          </a:stretch>
+        </p:blipFill>
+        <p:spPr>
+          <a:xfrm>
+            <a:off x="3340906" y="2460146"/>
+            <a:ext cx="2159635" cy="1295400"/>
+          </a:xfrm>
+          <a:prstGeom prst="rect">
+            <a:avLst/>
+          </a:prstGeom>
+        </p:spPr>
+      </p:pic>
+    </p:spTree>
+    <p:extLst>
+      <p:ext uri="{BB962C8B-B14F-4D97-AF65-F5344CB8AC3E}">
+        <p14:creationId xmlns:p14="http://schemas.microsoft.com/office/powerpoint/2010/main" val="2579594553"/>
+      </p:ext>
+    </p:extLst>
+  </p:cSld>
+  <p:clrMapOvr>
+    <a:masterClrMapping/>
+  </p:clrMapOvr>
+</p:sld>
+</file>
+
+<file path=ppt/slides/slide5.xml><?xml version="1.0" encoding="utf-8"?>
+<p:sld xmlns:a="http://schemas.openxmlformats.org/drawingml/2006/main" xmlns:r="http://schemas.openxmlformats.org/officeDocument/2006/relationships" xmlns:p="http://schemas.openxmlformats.org/presentationml/2006/main">
+  <p:cSld>
+    <p:spTree>
+      <p:nvGrpSpPr>
+        <p:cNvPr id="1" name=""/>
+        <p:cNvGrpSpPr/>
+        <p:nvPr/>
+      </p:nvGrpSpPr>
+      <p:grpSpPr>
+        <a:xfrm>
+          <a:off x="0" y="0"/>
+          <a:ext cx="0" cy="0"/>
+          <a:chOff x="0" y="0"/>
+          <a:chExt cx="0" cy="0"/>
+        </a:xfrm>
+      </p:grpSpPr>
+      <p:pic>
+        <p:nvPicPr>
+          <p:cNvPr id="5" name="Picture 4">
+            <a:extLst>
+              <a:ext uri="{FF2B5EF4-FFF2-40B4-BE49-F238E27FC236}">
+                <a16:creationId xmlns:a16="http://schemas.microsoft.com/office/drawing/2014/main" id="{0ACAF26C-7B37-A735-5A6A-36A4AD4CEC52}"/>
+              </a:ext>
+            </a:extLst>
+          </p:cNvPr>
+          <p:cNvPicPr>
+            <a:picLocks noChangeAspect="1"/>
+          </p:cNvPicPr>
+          <p:nvPr/>
+        </p:nvPicPr>
+        <p:blipFill>
+          <a:blip r:embed="rId2">
+            <a:extLst>
+              <a:ext uri="{28A0092B-C50C-407E-A947-70E740481C1C}">
+                <a14:useLocalDpi xmlns:a14="http://schemas.microsoft.com/office/drawing/2010/main" val="0"/>
+              </a:ext>
+            </a:extLst>
+          </a:blip>
+          <a:stretch>
+            <a:fillRect/>
+          </a:stretch>
+        </p:blipFill>
+        <p:spPr>
+          <a:xfrm>
+            <a:off x="3730523" y="315406"/>
+            <a:ext cx="5645421" cy="3294011"/>
+          </a:xfrm>
+          <a:prstGeom prst="rect">
+            <a:avLst/>
+          </a:prstGeom>
+        </p:spPr>
+      </p:pic>
+      <p:pic>
+        <p:nvPicPr>
+          <p:cNvPr id="7" name="Picture 6">
+            <a:extLst>
+              <a:ext uri="{FF2B5EF4-FFF2-40B4-BE49-F238E27FC236}">
+                <a16:creationId xmlns:a16="http://schemas.microsoft.com/office/drawing/2014/main" id="{87166046-C766-9987-C6E4-4C4B7836B720}"/>
+              </a:ext>
+            </a:extLst>
+          </p:cNvPr>
+          <p:cNvPicPr>
+            <a:picLocks noChangeAspect="1"/>
+          </p:cNvPicPr>
+          <p:nvPr/>
+        </p:nvPicPr>
+        <p:blipFill>
+          <a:blip r:embed="rId3">
+            <a:extLst>
+              <a:ext uri="{28A0092B-C50C-407E-A947-70E740481C1C}">
+                <a14:useLocalDpi xmlns:a14="http://schemas.microsoft.com/office/drawing/2010/main" val="0"/>
+              </a:ext>
+            </a:extLst>
+          </a:blip>
+          <a:stretch>
+            <a:fillRect/>
+          </a:stretch>
+        </p:blipFill>
+        <p:spPr>
+          <a:xfrm>
+            <a:off x="3730524" y="3734429"/>
+            <a:ext cx="5645421" cy="3028533"/>
+          </a:xfrm>
+          <a:prstGeom prst="rect">
+            <a:avLst/>
+          </a:prstGeom>
+        </p:spPr>
+      </p:pic>
+    </p:spTree>
+    <p:extLst>
+      <p:ext uri="{BB962C8B-B14F-4D97-AF65-F5344CB8AC3E}">
+        <p14:creationId xmlns:p14="http://schemas.microsoft.com/office/powerpoint/2010/main" val="465615707"/>
+      </p:ext>
+    </p:extLst>
+  </p:cSld>
+  <p:clrMapOvr>
+    <a:masterClrMapping/>
+  </p:clrMapOvr>
+</p:sld>
+</file>
+
+<file path=ppt/slides/slide6.xml><?xml version="1.0" encoding="utf-8"?>
+<p:sld xmlns:a="http://schemas.openxmlformats.org/drawingml/2006/main" xmlns:r="http://schemas.openxmlformats.org/officeDocument/2006/relationships" xmlns:p="http://schemas.openxmlformats.org/presentationml/2006/main">
+  <p:cSld>
+    <p:spTree>
+      <p:nvGrpSpPr>
+        <p:cNvPr id="1" name=""/>
+        <p:cNvGrpSpPr/>
+        <p:nvPr/>
+      </p:nvGrpSpPr>
+      <p:grpSpPr>
+        <a:xfrm>
+          <a:off x="0" y="0"/>
+          <a:ext cx="0" cy="0"/>
+          <a:chOff x="0" y="0"/>
+          <a:chExt cx="0" cy="0"/>
+        </a:xfrm>
+      </p:grpSpPr>
+      <p:pic>
+        <p:nvPicPr>
+          <p:cNvPr id="5" name="Picture 4">
+            <a:extLst>
+              <a:ext uri="{FF2B5EF4-FFF2-40B4-BE49-F238E27FC236}">
+                <a16:creationId xmlns:a16="http://schemas.microsoft.com/office/drawing/2014/main" id="{028DA174-EF05-940E-C18E-C451EA3CA791}"/>
+              </a:ext>
+            </a:extLst>
+          </p:cNvPr>
+          <p:cNvPicPr>
+            <a:picLocks noChangeAspect="1"/>
+          </p:cNvPicPr>
+          <p:nvPr/>
+        </p:nvPicPr>
+        <p:blipFill>
+          <a:blip r:embed="rId2">
+            <a:extLst>
+              <a:ext uri="{28A0092B-C50C-407E-A947-70E740481C1C}">
+                <a14:useLocalDpi xmlns:a14="http://schemas.microsoft.com/office/drawing/2010/main" val="0"/>
+              </a:ext>
+            </a:extLst>
+          </a:blip>
+          <a:stretch>
+            <a:fillRect/>
+          </a:stretch>
+        </p:blipFill>
+        <p:spPr>
+          <a:xfrm>
+            <a:off x="6037166" y="102895"/>
+            <a:ext cx="4741112" cy="1725342"/>
+          </a:xfrm>
+          <a:prstGeom prst="rect">
+            <a:avLst/>
+          </a:prstGeom>
+        </p:spPr>
+      </p:pic>
+      <p:pic>
+        <p:nvPicPr>
+          <p:cNvPr id="7" name="Picture 6">
+            <a:extLst>
+              <a:ext uri="{FF2B5EF4-FFF2-40B4-BE49-F238E27FC236}">
+                <a16:creationId xmlns:a16="http://schemas.microsoft.com/office/drawing/2014/main" id="{2AAEAC92-3094-380F-A2C4-02EA0804B62C}"/>
+              </a:ext>
+            </a:extLst>
+          </p:cNvPr>
+          <p:cNvPicPr>
+            <a:picLocks noChangeAspect="1"/>
+          </p:cNvPicPr>
+          <p:nvPr/>
+        </p:nvPicPr>
+        <p:blipFill>
+          <a:blip r:embed="rId3">
+            <a:extLst>
+              <a:ext uri="{28A0092B-C50C-407E-A947-70E740481C1C}">
+                <a14:useLocalDpi xmlns:a14="http://schemas.microsoft.com/office/drawing/2010/main" val="0"/>
+              </a:ext>
+            </a:extLst>
+          </a:blip>
+          <a:stretch>
+            <a:fillRect/>
+          </a:stretch>
+        </p:blipFill>
+        <p:spPr>
+          <a:xfrm>
+            <a:off x="5190133" y="1935637"/>
+            <a:ext cx="3775447" cy="1183781"/>
+          </a:xfrm>
+          <a:prstGeom prst="rect">
+            <a:avLst/>
+          </a:prstGeom>
+        </p:spPr>
+      </p:pic>
+      <p:pic>
+        <p:nvPicPr>
+          <p:cNvPr id="9" name="Picture 8">
+            <a:extLst>
+              <a:ext uri="{FF2B5EF4-FFF2-40B4-BE49-F238E27FC236}">
+                <a16:creationId xmlns:a16="http://schemas.microsoft.com/office/drawing/2014/main" id="{862C1737-D7E7-0DB2-3E2E-080086572BAC}"/>
+              </a:ext>
+            </a:extLst>
+          </p:cNvPr>
+          <p:cNvPicPr>
+            <a:picLocks noChangeAspect="1"/>
+          </p:cNvPicPr>
+          <p:nvPr/>
+        </p:nvPicPr>
+        <p:blipFill>
+          <a:blip r:embed="rId4"/>
+          <a:stretch>
+            <a:fillRect/>
+          </a:stretch>
+        </p:blipFill>
+        <p:spPr>
+          <a:xfrm>
+            <a:off x="9077345" y="2315126"/>
+            <a:ext cx="1700933" cy="562991"/>
+          </a:xfrm>
+          <a:prstGeom prst="rect">
+            <a:avLst/>
+          </a:prstGeom>
+        </p:spPr>
+      </p:pic>
+      <p:pic>
+        <p:nvPicPr>
+          <p:cNvPr id="11" name="Picture 10">
+            <a:extLst>
+              <a:ext uri="{FF2B5EF4-FFF2-40B4-BE49-F238E27FC236}">
+                <a16:creationId xmlns:a16="http://schemas.microsoft.com/office/drawing/2014/main" id="{6F624412-9CA5-B034-6B0E-A77BCD085DC4}"/>
+              </a:ext>
+            </a:extLst>
+          </p:cNvPr>
+          <p:cNvPicPr>
+            <a:picLocks noChangeAspect="1"/>
+          </p:cNvPicPr>
+          <p:nvPr/>
+        </p:nvPicPr>
+        <p:blipFill>
+          <a:blip r:embed="rId5"/>
+          <a:stretch>
+            <a:fillRect/>
+          </a:stretch>
+        </p:blipFill>
+        <p:spPr>
+          <a:xfrm>
+            <a:off x="6037165" y="3075812"/>
+            <a:ext cx="4741111" cy="3514000"/>
+          </a:xfrm>
+          <a:prstGeom prst="rect">
+            <a:avLst/>
+          </a:prstGeom>
+        </p:spPr>
+      </p:pic>
+    </p:spTree>
+    <p:extLst>
+      <p:ext uri="{BB962C8B-B14F-4D97-AF65-F5344CB8AC3E}">
+        <p14:creationId xmlns:p14="http://schemas.microsoft.com/office/powerpoint/2010/main" val="1337551032"/>
       </p:ext>
     </p:extLst>
   </p:cSld>
